--- a/PPT/College Management System Architecture.pptx
+++ b/PPT/College Management System Architecture.pptx
@@ -1458,8 +1458,8 @@
         </p:nvSpPr>
         <p:spPr>
           <a:xfrm>
-            <a:off x="1143225" y="685800"/>
-            <a:ext cx="4572225" cy="3429000"/>
+            <a:off x="381000" y="685800"/>
+            <a:ext cx="6096000" cy="3429000"/>
           </a:xfrm>
           <a:custGeom>
             <a:avLst/>
@@ -16226,7 +16226,7 @@
         <p:spPr>
           <a:xfrm>
             <a:off x="3571875" y="4321373"/>
-            <a:ext cx="1333500" cy="381000"/>
+            <a:ext cx="3723660" cy="381000"/>
           </a:xfrm>
           <a:prstGeom prst="rect">
             <a:avLst/>
@@ -16252,7 +16252,7 @@
         </p:blipFill>
         <p:spPr>
           <a:xfrm>
-            <a:off x="1152525" y="4435673"/>
+            <a:off x="1014877" y="4435673"/>
             <a:ext cx="190500" cy="152400"/>
           </a:xfrm>
           <a:prstGeom prst="rect">
@@ -16279,7 +16279,7 @@
         </p:blipFill>
         <p:spPr>
           <a:xfrm>
-            <a:off x="2495550" y="4435673"/>
+            <a:off x="2397230" y="4435673"/>
             <a:ext cx="133350" cy="152400"/>
           </a:xfrm>
           <a:prstGeom prst="rect">
@@ -16306,7 +16306,7 @@
         </p:blipFill>
         <p:spPr>
           <a:xfrm>
-            <a:off x="3762375" y="4435673"/>
+            <a:off x="3772212" y="4435673"/>
             <a:ext cx="190500" cy="152400"/>
           </a:xfrm>
           <a:prstGeom prst="rect">
@@ -16318,6 +16318,116 @@
           </a:ln>
         </p:spPr>
       </p:pic>
+      <p:sp>
+        <p:nvSpPr>
+          <p:cNvPr id="4" name="Rectangle: Rounded Corners 3">
+            <a:extLst>
+              <a:ext uri="{FF2B5EF4-FFF2-40B4-BE49-F238E27FC236}">
+                <a16:creationId xmlns:a16="http://schemas.microsoft.com/office/drawing/2014/main" id="{E591623C-F34C-CE9C-2B8E-DFA6BB89D897}"/>
+              </a:ext>
+            </a:extLst>
+          </p:cNvPr>
+          <p:cNvSpPr/>
+          <p:nvPr/>
+        </p:nvSpPr>
+        <p:spPr>
+          <a:xfrm>
+            <a:off x="4405162" y="4435673"/>
+            <a:ext cx="2438090" cy="152400"/>
+          </a:xfrm>
+          <a:prstGeom prst="roundRect">
+            <a:avLst/>
+          </a:prstGeom>
+          <a:solidFill>
+            <a:srgbClr val="334155"/>
+          </a:solidFill>
+          <a:ln>
+            <a:solidFill>
+              <a:srgbClr val="334155"/>
+            </a:solidFill>
+          </a:ln>
+        </p:spPr>
+        <p:style>
+          <a:lnRef idx="2">
+            <a:schemeClr val="accent1">
+              <a:shade val="15000"/>
+            </a:schemeClr>
+          </a:lnRef>
+          <a:fillRef idx="1">
+            <a:schemeClr val="accent1"/>
+          </a:fillRef>
+          <a:effectRef idx="0">
+            <a:schemeClr val="accent1"/>
+          </a:effectRef>
+          <a:fontRef idx="minor">
+            <a:schemeClr val="lt1"/>
+          </a:fontRef>
+        </p:style>
+        <p:txBody>
+          <a:bodyPr rtlCol="0" anchor="ctr"/>
+          <a:lstStyle/>
+          <a:p>
+            <a:pPr algn="ctr"/>
+            <a:endParaRPr lang="en-IN"/>
+          </a:p>
+        </p:txBody>
+      </p:sp>
+      <p:sp>
+        <p:nvSpPr>
+          <p:cNvPr id="3" name="TextBox 2">
+            <a:extLst>
+              <a:ext uri="{FF2B5EF4-FFF2-40B4-BE49-F238E27FC236}">
+                <a16:creationId xmlns:a16="http://schemas.microsoft.com/office/drawing/2014/main" id="{232B5BF3-9820-622E-159E-E2798EDD9E42}"/>
+              </a:ext>
+            </a:extLst>
+          </p:cNvPr>
+          <p:cNvSpPr txBox="1"/>
+          <p:nvPr/>
+        </p:nvSpPr>
+        <p:spPr>
+          <a:xfrm>
+            <a:off x="4429431" y="4357984"/>
+            <a:ext cx="6174658" cy="307777"/>
+          </a:xfrm>
+          <a:prstGeom prst="rect">
+            <a:avLst/>
+          </a:prstGeom>
+          <a:noFill/>
+        </p:spPr>
+        <p:txBody>
+          <a:bodyPr wrap="square">
+            <a:spAutoFit/>
+          </a:bodyPr>
+          <a:lstStyle/>
+          <a:p>
+            <a:r>
+              <a:rPr lang="en-US" sz="1400" b="0" i="0" u="none" strike="noStrike" cap="none" dirty="0" err="1">
+                <a:solidFill>
+                  <a:srgbClr val="CBD5E1"/>
+                </a:solidFill>
+                <a:latin typeface="Inter"/>
+                <a:ea typeface="Inter"/>
+                <a:cs typeface="Inter"/>
+                <a:sym typeface="Inter"/>
+              </a:rPr>
+              <a:t>Ollama</a:t>
+            </a:r>
+            <a:r>
+              <a:rPr lang="en-US" sz="1400" b="0" i="0" u="none" strike="noStrike" cap="none" dirty="0">
+                <a:solidFill>
+                  <a:srgbClr val="CBD5E1"/>
+                </a:solidFill>
+                <a:latin typeface="Inter"/>
+                <a:ea typeface="Inter"/>
+                <a:cs typeface="Inter"/>
+                <a:sym typeface="Inter"/>
+              </a:rPr>
+              <a:t> (Gemma 4)</a:t>
+            </a:r>
+            <a:endParaRPr lang="en-IN" dirty="0"/>
+          </a:p>
+        </p:txBody>
+      </p:sp>
     </p:spTree>
   </p:cSld>
   <p:clrMapOvr>
@@ -17247,7 +17357,7 @@
                         <a:buNone/>
                       </a:pPr>
                       <a:r>
-                        <a:rPr lang="en-US" sz="1500" b="1" i="0" u="none" strike="noStrike" cap="none">
+                        <a:rPr lang="en-US" sz="1500" b="1" i="0" u="none" strike="noStrike" cap="none" dirty="0">
                           <a:solidFill>
                             <a:srgbClr val="38BDF8"/>
                           </a:solidFill>
@@ -17258,7 +17368,7 @@
                         </a:rPr>
                         <a:t>Technology</a:t>
                       </a:r>
-                      <a:endParaRPr/>
+                      <a:endParaRPr dirty="0"/>
                     </a:p>
                   </a:txBody>
                   <a:tcPr marL="63500" marR="63500" marT="25400" marB="25400" anchor="ctr">
@@ -17491,7 +17601,7 @@
                         <a:buNone/>
                       </a:pPr>
                       <a:r>
-                        <a:rPr lang="en-US" sz="1200" b="0" i="0" u="none" strike="noStrike" cap="none">
+                        <a:rPr lang="en-US" sz="1200" b="0" i="0" u="none" strike="noStrike" cap="none" dirty="0">
                           <a:solidFill>
                             <a:srgbClr val="CBD5E1"/>
                           </a:solidFill>
@@ -17502,7 +17612,7 @@
                         </a:rPr>
                         <a:t>HTML, CSS, JS</a:t>
                       </a:r>
-                      <a:endParaRPr/>
+                      <a:endParaRPr dirty="0"/>
                     </a:p>
                   </a:txBody>
                   <a:tcPr marL="63500" marR="63500" marT="25400" marB="25400" anchor="ctr">
@@ -17735,7 +17845,7 @@
                         <a:buNone/>
                       </a:pPr>
                       <a:r>
-                        <a:rPr lang="en-US" sz="1200" b="0" i="0" u="none" strike="noStrike" cap="none">
+                        <a:rPr lang="en-US" sz="1200" b="0" i="0" u="none" strike="noStrike" cap="none" dirty="0">
                           <a:solidFill>
                             <a:srgbClr val="CBD5E1"/>
                           </a:solidFill>
@@ -17744,9 +17854,33 @@
                           <a:cs typeface="Inter"/>
                           <a:sym typeface="Inter"/>
                         </a:rPr>
-                        <a:t>Python (FastAPI)</a:t>
+                        <a:t>Python (</a:t>
                       </a:r>
-                      <a:endParaRPr/>
+                      <a:r>
+                        <a:rPr lang="en-US" sz="1200" b="0" i="0" u="none" strike="noStrike" cap="none" dirty="0" err="1">
+                          <a:solidFill>
+                            <a:srgbClr val="CBD5E1"/>
+                          </a:solidFill>
+                          <a:latin typeface="Inter"/>
+                          <a:ea typeface="Inter"/>
+                          <a:cs typeface="Inter"/>
+                          <a:sym typeface="Inter"/>
+                        </a:rPr>
+                        <a:t>FastAPI</a:t>
+                      </a:r>
+                      <a:r>
+                        <a:rPr lang="en-US" sz="1200" b="0" i="0" u="none" strike="noStrike" cap="none" dirty="0">
+                          <a:solidFill>
+                            <a:srgbClr val="CBD5E1"/>
+                          </a:solidFill>
+                          <a:latin typeface="Inter"/>
+                          <a:ea typeface="Inter"/>
+                          <a:cs typeface="Inter"/>
+                          <a:sym typeface="Inter"/>
+                        </a:rPr>
+                        <a:t>)</a:t>
+                      </a:r>
+                      <a:endParaRPr dirty="0"/>
                     </a:p>
                   </a:txBody>
                   <a:tcPr marL="63500" marR="63500" marT="25400" marB="25400" anchor="ctr">
@@ -17979,7 +18113,7 @@
                         <a:buNone/>
                       </a:pPr>
                       <a:r>
-                        <a:rPr lang="en-US" sz="1200" b="0" i="0" u="none" strike="noStrike" cap="none">
+                        <a:rPr lang="en-US" sz="1200" b="0" i="0" u="none" strike="noStrike" cap="none" dirty="0">
                           <a:solidFill>
                             <a:srgbClr val="CBD5E1"/>
                           </a:solidFill>
@@ -17990,7 +18124,7 @@
                         </a:rPr>
                         <a:t>MySQL (XAMPP)</a:t>
                       </a:r>
-                      <a:endParaRPr/>
+                      <a:endParaRPr dirty="0"/>
                     </a:p>
                   </a:txBody>
                   <a:tcPr marL="63500" marR="63500" marT="25400" marB="25400" anchor="ctr">
